--- a/sayt/media/resources/2026/10/axborot-xavfsizligi-41-mavzu.pptx
+++ b/sayt/media/resources/2026/10/axborot-xavfsizligi-41-mavzu.pptx
@@ -16572,7 +16572,7 @@
         </p:nvGraphicFramePr>
         <p:xfrm>
           <a:off x="731520" y="1645158"/>
-          <a:ext cx="10728654" cy="3811905"/>
+          <a:ext cx="10728654" cy="4113530"/>
         </p:xfrm>
         <a:graphic>
           <a:graphicData uri="http://schemas.openxmlformats.org/drawingml/2006/table">
@@ -16581,9 +16581,9 @@
                 <a:tableStyleId>{5C22544A-7EE6-4342-B048-85BDC9FD1C3A}</a:tableStyleId>
               </a:tblPr>
               <a:tblGrid>
-                <a:gridCol w="2554441"/>
-                <a:gridCol w="5108883"/>
-                <a:gridCol w="3065330"/>
+                <a:gridCol w="2438330"/>
+                <a:gridCol w="4876661"/>
+                <a:gridCol w="3413663"/>
               </a:tblGrid>
               <a:tr h="484505">
                 <a:tc>
@@ -16721,7 +16721,7 @@
                   </a:tcPr>
                 </a:tc>
               </a:tr>
-              <a:tr h="484505">
+              <a:tr h="786130">
                 <a:tc>
                   <a:txBody>
                     <a:bodyPr wrap="square"/>
@@ -16778,7 +16778,7 @@
                           </a:solidFill>
                           <a:latin typeface="Segoe UI"/>
                         </a:rPr>
-                        <a:t>7-Zip, Google Chrome</a:t>
+                        <a:t>Google Chrome, Adobe Acrobat Reader</a:t>
                       </a:r>
                     </a:p>
                   </a:txBody>
@@ -16914,7 +16914,7 @@
                           </a:solidFill>
                           <a:latin typeface="Segoe UI"/>
                         </a:rPr>
-                        <a:t>Linux, LibreOffice, Firefox</a:t>
+                        <a:t>Linux, LibreOffice, Firefox, 7-Zip</a:t>
                       </a:r>
                     </a:p>
                   </a:txBody>
